--- a/clase4/clase4.pptx
+++ b/clase4/clase4.pptx
@@ -133,7 +133,7 @@
   <pc:docChgLst>
     <pc:chgData name="Nahuel Roel" userId="f57eb92d7f62e27b" providerId="LiveId" clId="{1698397B-2804-4513-BF38-7951CB4798F0}"/>
     <pc:docChg chg="undo redo custSel addSld delSld modSld sldOrd">
-      <pc:chgData name="Nahuel Roel" userId="f57eb92d7f62e27b" providerId="LiveId" clId="{1698397B-2804-4513-BF38-7951CB4798F0}" dt="2026-09-26T20:28:16.768" v="401" actId="478"/>
+      <pc:chgData name="Nahuel Roel" userId="f57eb92d7f62e27b" providerId="LiveId" clId="{1698397B-2804-4513-BF38-7951CB4798F0}" dt="2026-09-26T21:59:08.230" v="430" actId="1076"/>
       <pc:docMkLst>
         <pc:docMk/>
       </pc:docMkLst>
@@ -216,7 +216,7 @@
         </pc:spChg>
       </pc:sldChg>
       <pc:sldChg chg="addSp delSp modSp mod">
-        <pc:chgData name="Nahuel Roel" userId="f57eb92d7f62e27b" providerId="LiveId" clId="{1698397B-2804-4513-BF38-7951CB4798F0}" dt="2026-09-26T20:20:05.060" v="224" actId="20577"/>
+        <pc:chgData name="Nahuel Roel" userId="f57eb92d7f62e27b" providerId="LiveId" clId="{1698397B-2804-4513-BF38-7951CB4798F0}" dt="2026-09-26T21:56:00.977" v="413" actId="1076"/>
         <pc:sldMkLst>
           <pc:docMk/>
           <pc:sldMk cId="0" sldId="258"/>
@@ -334,11 +334,27 @@
           </ac:spMkLst>
         </pc:spChg>
         <pc:picChg chg="add mod">
+          <ac:chgData name="Nahuel Roel" userId="f57eb92d7f62e27b" providerId="LiveId" clId="{1698397B-2804-4513-BF38-7951CB4798F0}" dt="2026-09-26T21:56:00.977" v="413" actId="1076"/>
+          <ac:picMkLst>
+            <pc:docMk/>
+            <pc:sldMk cId="0" sldId="258"/>
+            <ac:picMk id="4" creationId="{FEEEF2AF-5797-B283-325E-288AECCFD51B}"/>
+          </ac:picMkLst>
+        </pc:picChg>
+        <pc:picChg chg="add mod">
           <ac:chgData name="Nahuel Roel" userId="f57eb92d7f62e27b" providerId="LiveId" clId="{1698397B-2804-4513-BF38-7951CB4798F0}" dt="2026-09-26T20:18:02.073" v="74" actId="1076"/>
           <ac:picMkLst>
             <pc:docMk/>
             <pc:sldMk cId="0" sldId="258"/>
             <ac:picMk id="19" creationId="{B4D1304C-9DB8-ADA7-9C94-5BFB501CEB80}"/>
+          </ac:picMkLst>
+        </pc:picChg>
+        <pc:picChg chg="del">
+          <ac:chgData name="Nahuel Roel" userId="f57eb92d7f62e27b" providerId="LiveId" clId="{1698397B-2804-4513-BF38-7951CB4798F0}" dt="2026-09-26T21:55:37.843" v="408" actId="478"/>
+          <ac:picMkLst>
+            <pc:docMk/>
+            <pc:sldMk cId="0" sldId="258"/>
+            <ac:picMk id="20" creationId="{00000000-0000-0000-0000-000000000000}"/>
           </ac:picMkLst>
         </pc:picChg>
       </pc:sldChg>
@@ -556,7 +572,7 @@
         </pc:spChg>
       </pc:sldChg>
       <pc:sldChg chg="addSp delSp modSp add mod ord">
-        <pc:chgData name="Nahuel Roel" userId="f57eb92d7f62e27b" providerId="LiveId" clId="{1698397B-2804-4513-BF38-7951CB4798F0}" dt="2026-09-26T20:20:00.715" v="221" actId="1076"/>
+        <pc:chgData name="Nahuel Roel" userId="f57eb92d7f62e27b" providerId="LiveId" clId="{1698397B-2804-4513-BF38-7951CB4798F0}" dt="2026-09-26T21:55:32.789" v="407" actId="1076"/>
         <pc:sldMkLst>
           <pc:docMk/>
           <pc:sldMk cId="245088736" sldId="263"/>
@@ -577,6 +593,22 @@
             <ac:picMk id="4" creationId="{73C89965-8635-48DC-08A7-A026EB8E9D94}"/>
           </ac:picMkLst>
         </pc:picChg>
+        <pc:picChg chg="add mod">
+          <ac:chgData name="Nahuel Roel" userId="f57eb92d7f62e27b" providerId="LiveId" clId="{1698397B-2804-4513-BF38-7951CB4798F0}" dt="2026-09-26T21:55:32.789" v="407" actId="1076"/>
+          <ac:picMkLst>
+            <pc:docMk/>
+            <pc:sldMk cId="245088736" sldId="263"/>
+            <ac:picMk id="4" creationId="{F6F43708-94C2-FEB1-05F2-DE428561199F}"/>
+          </ac:picMkLst>
+        </pc:picChg>
+        <pc:picChg chg="del">
+          <ac:chgData name="Nahuel Roel" userId="f57eb92d7f62e27b" providerId="LiveId" clId="{1698397B-2804-4513-BF38-7951CB4798F0}" dt="2026-09-26T21:55:25.720" v="402" actId="478"/>
+          <ac:picMkLst>
+            <pc:docMk/>
+            <pc:sldMk cId="245088736" sldId="263"/>
+            <ac:picMk id="18" creationId="{00000000-0000-0000-0000-000000000000}"/>
+          </ac:picMkLst>
+        </pc:picChg>
         <pc:picChg chg="del">
           <ac:chgData name="Nahuel Roel" userId="f57eb92d7f62e27b" providerId="LiveId" clId="{1698397B-2804-4513-BF38-7951CB4798F0}" dt="2026-09-26T20:18:28.706" v="76" actId="478"/>
           <ac:picMkLst>
@@ -587,7 +619,7 @@
         </pc:picChg>
       </pc:sldChg>
       <pc:sldChg chg="addSp delSp modSp add mod">
-        <pc:chgData name="Nahuel Roel" userId="f57eb92d7f62e27b" providerId="LiveId" clId="{1698397B-2804-4513-BF38-7951CB4798F0}" dt="2026-09-26T20:23:33.699" v="261" actId="20577"/>
+        <pc:chgData name="Nahuel Roel" userId="f57eb92d7f62e27b" providerId="LiveId" clId="{1698397B-2804-4513-BF38-7951CB4798F0}" dt="2026-09-26T21:56:47.302" v="422" actId="1076"/>
         <pc:sldMkLst>
           <pc:docMk/>
           <pc:sldMk cId="3812165332" sldId="264"/>
@@ -633,11 +665,27 @@
           </ac:picMkLst>
         </pc:picChg>
         <pc:picChg chg="add mod">
+          <ac:chgData name="Nahuel Roel" userId="f57eb92d7f62e27b" providerId="LiveId" clId="{1698397B-2804-4513-BF38-7951CB4798F0}" dt="2026-09-26T21:56:47.302" v="422" actId="1076"/>
+          <ac:picMkLst>
+            <pc:docMk/>
+            <pc:sldMk cId="3812165332" sldId="264"/>
+            <ac:picMk id="4" creationId="{D1696E26-F1AD-98DD-A720-2D97C36B173E}"/>
+          </ac:picMkLst>
+        </pc:picChg>
+        <pc:picChg chg="add mod">
           <ac:chgData name="Nahuel Roel" userId="f57eb92d7f62e27b" providerId="LiveId" clId="{1698397B-2804-4513-BF38-7951CB4798F0}" dt="2026-09-26T20:23:12.245" v="255" actId="1076"/>
           <ac:picMkLst>
             <pc:docMk/>
             <pc:sldMk cId="3812165332" sldId="264"/>
             <ac:picMk id="6" creationId="{245D6323-744C-FC64-081D-3F6868E6F7DA}"/>
+          </ac:picMkLst>
+        </pc:picChg>
+        <pc:picChg chg="del">
+          <ac:chgData name="Nahuel Roel" userId="f57eb92d7f62e27b" providerId="LiveId" clId="{1698397B-2804-4513-BF38-7951CB4798F0}" dt="2026-09-26T21:56:08.175" v="414" actId="478"/>
+          <ac:picMkLst>
+            <pc:docMk/>
+            <pc:sldMk cId="3812165332" sldId="264"/>
+            <ac:picMk id="18" creationId="{00000000-0000-0000-0000-000000000000}"/>
           </ac:picMkLst>
         </pc:picChg>
         <pc:picChg chg="add del">
@@ -650,7 +698,7 @@
         </pc:picChg>
       </pc:sldChg>
       <pc:sldChg chg="addSp delSp modSp add mod">
-        <pc:chgData name="Nahuel Roel" userId="f57eb92d7f62e27b" providerId="LiveId" clId="{1698397B-2804-4513-BF38-7951CB4798F0}" dt="2026-09-26T20:25:14.207" v="315" actId="1076"/>
+        <pc:chgData name="Nahuel Roel" userId="f57eb92d7f62e27b" providerId="LiveId" clId="{1698397B-2804-4513-BF38-7951CB4798F0}" dt="2026-09-26T21:59:08.230" v="430" actId="1076"/>
         <pc:sldMkLst>
           <pc:docMk/>
           <pc:sldMk cId="972062348" sldId="265"/>
@@ -680,6 +728,14 @@
           </ac:spMkLst>
         </pc:spChg>
         <pc:picChg chg="add mod">
+          <ac:chgData name="Nahuel Roel" userId="f57eb92d7f62e27b" providerId="LiveId" clId="{1698397B-2804-4513-BF38-7951CB4798F0}" dt="2026-09-26T21:59:08.230" v="430" actId="1076"/>
+          <ac:picMkLst>
+            <pc:docMk/>
+            <pc:sldMk cId="972062348" sldId="265"/>
+            <ac:picMk id="4" creationId="{9EB40EA8-555B-3BA1-4834-20BA6923A30C}"/>
+          </ac:picMkLst>
+        </pc:picChg>
+        <pc:picChg chg="add mod">
           <ac:chgData name="Nahuel Roel" userId="f57eb92d7f62e27b" providerId="LiveId" clId="{1698397B-2804-4513-BF38-7951CB4798F0}" dt="2026-09-26T20:25:14.207" v="315" actId="1076"/>
           <ac:picMkLst>
             <pc:docMk/>
@@ -693,6 +749,14 @@
             <pc:docMk/>
             <pc:sldMk cId="972062348" sldId="265"/>
             <ac:picMk id="6" creationId="{21AE8783-30D3-B8F4-173A-AB2594BA4003}"/>
+          </ac:picMkLst>
+        </pc:picChg>
+        <pc:picChg chg="del">
+          <ac:chgData name="Nahuel Roel" userId="f57eb92d7f62e27b" providerId="LiveId" clId="{1698397B-2804-4513-BF38-7951CB4798F0}" dt="2026-09-26T21:58:28.296" v="423" actId="478"/>
+          <ac:picMkLst>
+            <pc:docMk/>
+            <pc:sldMk cId="972062348" sldId="265"/>
+            <ac:picMk id="18" creationId="{00000000-0000-0000-0000-000000000000}"/>
           </ac:picMkLst>
         </pc:picChg>
       </pc:sldChg>
@@ -3020,7 +3084,16 @@
               <a:t>.</a:t>
             </a:r>
           </a:p>
-          <a:p/>
+          <a:p>
+            <a:endParaRPr lang="es-ES" sz="1400" b="1" dirty="0">
+              <a:solidFill>
+                <a:schemeClr val="bg1"/>
+              </a:solidFill>
+              <a:latin typeface="Calibri" pitchFamily="34" charset="0"/>
+              <a:ea typeface="Calibri" pitchFamily="34" charset="-122"/>
+              <a:cs typeface="Calibri" pitchFamily="34" charset="-120"/>
+            </a:endParaRPr>
+          </a:p>
           <a:p>
             <a:r>
               <a:rPr lang="es-ES" sz="1400" b="1" i="1" dirty="0">
@@ -3071,31 +3144,35 @@
       </p:sp>
       <p:pic>
         <p:nvPicPr>
-          <p:cNvPr id="18" name="Picture 17" descr="img1.png"/>
+          <p:cNvPr id="4" name="Picture 3">
+            <a:extLst>
+              <a:ext uri="{FF2B5EF4-FFF2-40B4-BE49-F238E27FC236}">
+                <a16:creationId xmlns:a16="http://schemas.microsoft.com/office/drawing/2014/main" id="{F6F43708-94C2-FEB1-05F2-DE428561199F}"/>
+              </a:ext>
+            </a:extLst>
+          </p:cNvPr>
           <p:cNvPicPr>
             <a:picLocks noChangeAspect="1"/>
           </p:cNvPicPr>
           <p:nvPr/>
         </p:nvPicPr>
         <p:blipFill>
-          <a:blip r:embed="rId4"/>
+          <a:blip r:embed="rId3"/>
           <a:stretch>
             <a:fillRect/>
           </a:stretch>
         </p:blipFill>
         <p:spPr>
           <a:xfrm>
-            <a:off x="5042464" y="685800"/>
-            <a:ext cx="3265311" cy="4069080"/>
+            <a:off x="4876649" y="542416"/>
+            <a:ext cx="3296680" cy="3818163"/>
           </a:xfrm>
           <a:prstGeom prst="rect">
             <a:avLst/>
           </a:prstGeom>
           <a:ln w="76200">
             <a:solidFill>
-              <a:schemeClr val="accent1">
-                <a:lumMod val="75000"/>
-              </a:schemeClr>
+              <a:schemeClr val="accent1"/>
             </a:solidFill>
           </a:ln>
         </p:spPr>
@@ -3410,7 +3487,16 @@
               <a:t> lo rellena.</a:t>
             </a:r>
           </a:p>
-          <a:p/>
+          <a:p>
+            <a:endParaRPr lang="es-ES" sz="1400" b="1" dirty="0" err="1">
+              <a:solidFill>
+                <a:schemeClr val="bg1"/>
+              </a:solidFill>
+              <a:latin typeface="Calibri" pitchFamily="34" charset="0"/>
+              <a:ea typeface="Calibri" pitchFamily="34" charset="-122"/>
+              <a:cs typeface="Calibri" pitchFamily="34" charset="-120"/>
+            </a:endParaRPr>
+          </a:p>
           <a:p>
             <a:r>
               <a:rPr lang="es-ES" sz="1400" b="1" dirty="0" err="1">
@@ -3516,31 +3602,35 @@
       </p:sp>
       <p:pic>
         <p:nvPicPr>
-          <p:cNvPr id="20" name="Picture 19" descr="img2.png"/>
+          <p:cNvPr id="4" name="Picture 3">
+            <a:extLst>
+              <a:ext uri="{FF2B5EF4-FFF2-40B4-BE49-F238E27FC236}">
+                <a16:creationId xmlns:a16="http://schemas.microsoft.com/office/drawing/2014/main" id="{FEEEF2AF-5797-B283-325E-288AECCFD51B}"/>
+              </a:ext>
+            </a:extLst>
+          </p:cNvPr>
           <p:cNvPicPr>
             <a:picLocks noChangeAspect="1"/>
           </p:cNvPicPr>
           <p:nvPr/>
         </p:nvPicPr>
         <p:blipFill>
-          <a:blip r:embed="rId4"/>
+          <a:blip r:embed="rId3"/>
           <a:stretch>
             <a:fillRect/>
           </a:stretch>
         </p:blipFill>
         <p:spPr>
           <a:xfrm>
-            <a:off x="4434840" y="1019074"/>
-            <a:ext cx="4480560" cy="3402530"/>
+            <a:off x="4383873" y="780757"/>
+            <a:ext cx="4501775" cy="2899117"/>
           </a:xfrm>
           <a:prstGeom prst="rect">
             <a:avLst/>
           </a:prstGeom>
           <a:ln w="76200">
             <a:solidFill>
-              <a:schemeClr val="accent1">
-                <a:lumMod val="75000"/>
-              </a:schemeClr>
+              <a:schemeClr val="accent1"/>
             </a:solidFill>
           </a:ln>
         </p:spPr>
@@ -3835,7 +3925,7 @@
               <a:t>Dentro de cada render, el server lee </a:t>
             </a:r>
             <a:r>
-              <a:rPr lang="es-ES" sz="1400" b="1" dirty="0" i="1">
+              <a:rPr lang="es-ES" sz="1400" b="1" i="1" dirty="0">
                 <a:solidFill>
                   <a:schemeClr val="bg1"/>
                 </a:solidFill>
@@ -3857,7 +3947,7 @@
               <a:t> e </a:t>
             </a:r>
             <a:r>
-              <a:rPr lang="es-ES" sz="1400" b="1" dirty="0" i="1">
+              <a:rPr lang="es-ES" sz="1400" b="1" i="1" dirty="0">
                 <a:solidFill>
                   <a:schemeClr val="bg1"/>
                 </a:solidFill>
@@ -3901,31 +3991,35 @@
       </p:sp>
       <p:pic>
         <p:nvPicPr>
-          <p:cNvPr id="18" name="Picture 17" descr="img3.png"/>
+          <p:cNvPr id="4" name="Picture 3">
+            <a:extLst>
+              <a:ext uri="{FF2B5EF4-FFF2-40B4-BE49-F238E27FC236}">
+                <a16:creationId xmlns:a16="http://schemas.microsoft.com/office/drawing/2014/main" id="{D1696E26-F1AD-98DD-A720-2D97C36B173E}"/>
+              </a:ext>
+            </a:extLst>
+          </p:cNvPr>
           <p:cNvPicPr>
             <a:picLocks noChangeAspect="1"/>
           </p:cNvPicPr>
           <p:nvPr/>
         </p:nvPicPr>
         <p:blipFill>
-          <a:blip r:embed="rId4"/>
+          <a:blip r:embed="rId3"/>
           <a:stretch>
             <a:fillRect/>
           </a:stretch>
         </p:blipFill>
         <p:spPr>
           <a:xfrm>
-            <a:off x="4434840" y="1504509"/>
-            <a:ext cx="4480560" cy="2431660"/>
+            <a:off x="3727940" y="1052965"/>
+            <a:ext cx="5212078" cy="2148393"/>
           </a:xfrm>
           <a:prstGeom prst="rect">
             <a:avLst/>
           </a:prstGeom>
           <a:ln w="76200">
             <a:solidFill>
-              <a:schemeClr val="accent1">
-                <a:lumMod val="75000"/>
-              </a:schemeClr>
+              <a:schemeClr val="accent1"/>
             </a:solidFill>
           </a:ln>
         </p:spPr>
@@ -4324,31 +4418,35 @@
       </p:sp>
       <p:pic>
         <p:nvPicPr>
-          <p:cNvPr id="18" name="Picture 17" descr="img4.png"/>
+          <p:cNvPr id="4" name="Picture 3">
+            <a:extLst>
+              <a:ext uri="{FF2B5EF4-FFF2-40B4-BE49-F238E27FC236}">
+                <a16:creationId xmlns:a16="http://schemas.microsoft.com/office/drawing/2014/main" id="{9EB40EA8-555B-3BA1-4834-20BA6923A30C}"/>
+              </a:ext>
+            </a:extLst>
+          </p:cNvPr>
           <p:cNvPicPr>
             <a:picLocks noChangeAspect="1"/>
           </p:cNvPicPr>
           <p:nvPr/>
         </p:nvPicPr>
         <p:blipFill>
-          <a:blip r:embed="rId4"/>
+          <a:blip r:embed="rId3"/>
           <a:stretch>
             <a:fillRect/>
           </a:stretch>
         </p:blipFill>
         <p:spPr>
           <a:xfrm>
-            <a:off x="4434840" y="1793908"/>
-            <a:ext cx="4480560" cy="1852863"/>
+            <a:off x="4450542" y="703384"/>
+            <a:ext cx="4253842" cy="3028598"/>
           </a:xfrm>
           <a:prstGeom prst="rect">
             <a:avLst/>
           </a:prstGeom>
           <a:ln w="76200">
             <a:solidFill>
-              <a:schemeClr val="accent1">
-                <a:lumMod val="75000"/>
-              </a:schemeClr>
+              <a:schemeClr val="accent1"/>
             </a:solidFill>
           </a:ln>
         </p:spPr>
@@ -5650,17 +5748,6 @@
               </a:spcAft>
               <a:buNone/>
             </a:pPr>
-            <a:r>
-              <a:rPr lang="en-US" sz="1100" dirty="0">
-                <a:solidFill>
-                  <a:srgbClr val="F1E9F8"/>
-                </a:solidFill>
-                <a:latin typeface="Courier New" pitchFamily="34" charset="0"/>
-                <a:ea typeface="Courier New" pitchFamily="34" charset="-122"/>
-                <a:cs typeface="Courier New" pitchFamily="34" charset="-120"/>
-              </a:rPr>
-              <a:t/>
-            </a:r>
             <a:endParaRPr lang="en-US" sz="1100" dirty="0"/>
           </a:p>
           <a:p>
